--- a/docs/pptx/entire/ritu-entire-ratio-by-bmi30.pptx
+++ b/docs/pptx/entire/ritu-entire-ratio-by-bmi30.pptx
@@ -2357,7 +2357,7 @@
           </p:nvSpPr>
           <p:spPr>
             <a:xfrm>
-              <a:off x="1019512" y="3084194"/>
+              <a:off x="1019512" y="3084195"/>
               <a:ext cx="7591371" cy="0"/>
             </a:xfrm>
             <a:custGeom>
@@ -2909,7 +2909,7 @@
                     <a:pt x="499698" y="2197892"/>
                   </a:lnTo>
                   <a:lnTo>
-                    <a:pt x="513204" y="2189032"/>
+                    <a:pt x="513204" y="2189033"/>
                   </a:lnTo>
                   <a:lnTo>
                     <a:pt x="526709" y="2180599"/>
@@ -2978,7 +2978,7 @@
                     <a:pt x="810322" y="2046676"/>
                   </a:lnTo>
                   <a:lnTo>
-                    <a:pt x="823827" y="2038510"/>
+                    <a:pt x="823827" y="2038511"/>
                   </a:lnTo>
                   <a:lnTo>
                     <a:pt x="837333" y="2029905"/>
@@ -3029,13 +3029,13 @@
                     <a:pt x="1039913" y="1841491"/>
                   </a:lnTo>
                   <a:lnTo>
-                    <a:pt x="1053419" y="1825021"/>
+                    <a:pt x="1053419" y="1825022"/>
                   </a:lnTo>
                   <a:lnTo>
                     <a:pt x="1066924" y="1808119"/>
                   </a:lnTo>
                   <a:lnTo>
-                    <a:pt x="1080430" y="1790654"/>
+                    <a:pt x="1080430" y="1790655"/>
                   </a:lnTo>
                   <a:lnTo>
                     <a:pt x="1093935" y="1772733"/>
@@ -3047,7 +3047,7 @@
                     <a:pt x="1120946" y="1735587"/>
                   </a:lnTo>
                   <a:lnTo>
-                    <a:pt x="1134451" y="1716343"/>
+                    <a:pt x="1134451" y="1716344"/>
                   </a:lnTo>
                   <a:lnTo>
                     <a:pt x="1147956" y="1696497"/>
@@ -3056,7 +3056,7 @@
                     <a:pt x="1161462" y="1676187"/>
                   </a:lnTo>
                   <a:lnTo>
-                    <a:pt x="1174967" y="1655401"/>
+                    <a:pt x="1174967" y="1655402"/>
                   </a:lnTo>
                   <a:lnTo>
                     <a:pt x="1188473" y="1634128"/>
@@ -3068,10 +3068,10 @@
                     <a:pt x="1215483" y="1589803"/>
                   </a:lnTo>
                   <a:lnTo>
-                    <a:pt x="1228989" y="1566755"/>
-                  </a:lnTo>
-                  <a:lnTo>
-                    <a:pt x="1242494" y="1543134"/>
+                    <a:pt x="1228989" y="1566756"/>
+                  </a:lnTo>
+                  <a:lnTo>
+                    <a:pt x="1242494" y="1543135"/>
                   </a:lnTo>
                   <a:lnTo>
                     <a:pt x="1255999" y="1518919"/>
@@ -3080,16 +3080,16 @@
                     <a:pt x="1269505" y="1493959"/>
                   </a:lnTo>
                   <a:lnTo>
-                    <a:pt x="1283010" y="1468229"/>
-                  </a:lnTo>
-                  <a:lnTo>
-                    <a:pt x="1296516" y="1441810"/>
+                    <a:pt x="1283010" y="1468230"/>
+                  </a:lnTo>
+                  <a:lnTo>
+                    <a:pt x="1296516" y="1441811"/>
                   </a:lnTo>
                   <a:lnTo>
                     <a:pt x="1310021" y="1414678"/>
                   </a:lnTo>
                   <a:lnTo>
-                    <a:pt x="1323526" y="1386807"/>
+                    <a:pt x="1323526" y="1386808"/>
                   </a:lnTo>
                   <a:lnTo>
                     <a:pt x="1337032" y="1357950"/>
@@ -3101,13 +3101,13 @@
                     <a:pt x="1364042" y="1297664"/>
                   </a:lnTo>
                   <a:lnTo>
-                    <a:pt x="1377548" y="1266261"/>
+                    <a:pt x="1377548" y="1266262"/>
                   </a:lnTo>
                   <a:lnTo>
                     <a:pt x="1391053" y="1233996"/>
                   </a:lnTo>
                   <a:lnTo>
-                    <a:pt x="1404559" y="1200534"/>
+                    <a:pt x="1404559" y="1200535"/>
                   </a:lnTo>
                   <a:lnTo>
                     <a:pt x="1418064" y="1166185"/>
@@ -3116,25 +3116,25 @@
                     <a:pt x="1431569" y="1130949"/>
                   </a:lnTo>
                   <a:lnTo>
-                    <a:pt x="1445075" y="1094830"/>
-                  </a:lnTo>
-                  <a:lnTo>
-                    <a:pt x="1458580" y="1057764"/>
+                    <a:pt x="1445075" y="1094831"/>
+                  </a:lnTo>
+                  <a:lnTo>
+                    <a:pt x="1458580" y="1057765"/>
                   </a:lnTo>
                   <a:lnTo>
                     <a:pt x="1472085" y="1019625"/>
                   </a:lnTo>
                   <a:lnTo>
-                    <a:pt x="1485591" y="980684"/>
-                  </a:lnTo>
-                  <a:lnTo>
-                    <a:pt x="1499096" y="940980"/>
-                  </a:lnTo>
-                  <a:lnTo>
-                    <a:pt x="1512602" y="900556"/>
-                  </a:lnTo>
-                  <a:lnTo>
-                    <a:pt x="1526107" y="859365"/>
+                    <a:pt x="1485591" y="980685"/>
+                  </a:lnTo>
+                  <a:lnTo>
+                    <a:pt x="1499096" y="940981"/>
+                  </a:lnTo>
+                  <a:lnTo>
+                    <a:pt x="1512602" y="900557"/>
+                  </a:lnTo>
+                  <a:lnTo>
+                    <a:pt x="1526107" y="859366"/>
                   </a:lnTo>
                   <a:lnTo>
                     <a:pt x="1539612" y="817514"/>
@@ -3143,13 +3143,13 @@
                     <a:pt x="1553118" y="775205"/>
                   </a:lnTo>
                   <a:lnTo>
-                    <a:pt x="1566623" y="732523"/>
+                    <a:pt x="1566623" y="732524"/>
                   </a:lnTo>
                   <a:lnTo>
                     <a:pt x="1580128" y="689559"/>
                   </a:lnTo>
                   <a:lnTo>
-                    <a:pt x="1593634" y="646414"/>
+                    <a:pt x="1593634" y="646415"/>
                   </a:lnTo>
                   <a:lnTo>
                     <a:pt x="1607139" y="603302"/>
@@ -3170,7 +3170,7 @@
                     <a:pt x="1674666" y="393591"/>
                   </a:lnTo>
                   <a:lnTo>
-                    <a:pt x="1688171" y="354074"/>
+                    <a:pt x="1688171" y="354075"/>
                   </a:lnTo>
                   <a:lnTo>
                     <a:pt x="1701677" y="315698"/>
@@ -3299,7 +3299,7 @@
                     <a:pt x="2255397" y="580406"/>
                   </a:lnTo>
                   <a:lnTo>
-                    <a:pt x="2268903" y="607404"/>
+                    <a:pt x="2268903" y="607405"/>
                   </a:lnTo>
                   <a:lnTo>
                     <a:pt x="2282408" y="633620"/>
@@ -3308,25 +3308,25 @@
                     <a:pt x="2295913" y="658913"/>
                   </a:lnTo>
                   <a:lnTo>
-                    <a:pt x="2309419" y="683078"/>
+                    <a:pt x="2309419" y="683079"/>
                   </a:lnTo>
                   <a:lnTo>
                     <a:pt x="2322924" y="706309"/>
                   </a:lnTo>
                   <a:lnTo>
-                    <a:pt x="2336430" y="728584"/>
+                    <a:pt x="2336430" y="728585"/>
                   </a:lnTo>
                   <a:lnTo>
                     <a:pt x="2349935" y="749887"/>
                   </a:lnTo>
                   <a:lnTo>
-                    <a:pt x="2363440" y="770017"/>
+                    <a:pt x="2363440" y="770018"/>
                   </a:lnTo>
                   <a:lnTo>
                     <a:pt x="2376946" y="788982"/>
                   </a:lnTo>
                   <a:lnTo>
-                    <a:pt x="2390451" y="806957"/>
+                    <a:pt x="2390451" y="806958"/>
                   </a:lnTo>
                   <a:lnTo>
                     <a:pt x="2403956" y="823951"/>
@@ -3377,10 +3377,10 @@
                     <a:pt x="2606537" y="973834"/>
                   </a:lnTo>
                   <a:lnTo>
-                    <a:pt x="2620042" y="979283"/>
-                  </a:lnTo>
-                  <a:lnTo>
-                    <a:pt x="2633548" y="984553"/>
+                    <a:pt x="2620042" y="979284"/>
+                  </a:lnTo>
+                  <a:lnTo>
+                    <a:pt x="2633548" y="984554"/>
                   </a:lnTo>
                   <a:lnTo>
                     <a:pt x="2647053" y="989754"/>
@@ -3407,7 +3407,7 @@
                     <a:pt x="2741591" y="1030308"/>
                   </a:lnTo>
                   <a:lnTo>
-                    <a:pt x="2755096" y="1037687"/>
+                    <a:pt x="2755096" y="1037688"/>
                   </a:lnTo>
                   <a:lnTo>
                     <a:pt x="2768602" y="1045638"/>
@@ -3443,10 +3443,10 @@
                     <a:pt x="2903655" y="1165477"/>
                   </a:lnTo>
                   <a:lnTo>
-                    <a:pt x="2917161" y="1181844"/>
-                  </a:lnTo>
-                  <a:lnTo>
-                    <a:pt x="2930666" y="1198930"/>
+                    <a:pt x="2917161" y="1181845"/>
+                  </a:lnTo>
+                  <a:lnTo>
+                    <a:pt x="2930666" y="1198931"/>
                   </a:lnTo>
                   <a:lnTo>
                     <a:pt x="2944171" y="1216862"/>
@@ -3488,13 +3488,13 @@
                     <a:pt x="3106236" y="1473574"/>
                   </a:lnTo>
                   <a:lnTo>
-                    <a:pt x="3119741" y="1496996"/>
+                    <a:pt x="3119741" y="1496997"/>
                   </a:lnTo>
                   <a:lnTo>
                     <a:pt x="3133247" y="1520539"/>
                   </a:lnTo>
                   <a:lnTo>
-                    <a:pt x="3146752" y="1544162"/>
+                    <a:pt x="3146752" y="1544163"/>
                   </a:lnTo>
                   <a:lnTo>
                     <a:pt x="3160257" y="1567820"/>
@@ -3518,7 +3518,7 @@
                     <a:pt x="3241290" y="1709241"/>
                   </a:lnTo>
                   <a:lnTo>
-                    <a:pt x="3254795" y="1732554"/>
+                    <a:pt x="3254795" y="1732555"/>
                   </a:lnTo>
                   <a:lnTo>
                     <a:pt x="3268300" y="1755727"/>
@@ -3542,7 +3542,7 @@
                     <a:pt x="3349333" y="1891602"/>
                   </a:lnTo>
                   <a:lnTo>
-                    <a:pt x="3362838" y="1913597"/>
+                    <a:pt x="3362838" y="1913598"/>
                   </a:lnTo>
                   <a:lnTo>
                     <a:pt x="3376343" y="1935385"/>
@@ -3572,7 +3572,7 @@
                     <a:pt x="3484387" y="2099379"/>
                   </a:lnTo>
                   <a:lnTo>
-                    <a:pt x="3497892" y="2118370"/>
+                    <a:pt x="3497892" y="2118371"/>
                   </a:lnTo>
                   <a:lnTo>
                     <a:pt x="3511397" y="2136999"/>
@@ -3590,7 +3590,7 @@
                     <a:pt x="3565419" y="2207123"/>
                   </a:lnTo>
                   <a:lnTo>
-                    <a:pt x="3578924" y="2223639"/>
+                    <a:pt x="3578924" y="2223640"/>
                   </a:lnTo>
                   <a:lnTo>
                     <a:pt x="3592430" y="2239604"/>
@@ -6009,7 +6009,7 @@
                     <a:pt x="499698" y="2197892"/>
                   </a:lnTo>
                   <a:lnTo>
-                    <a:pt x="513204" y="2189032"/>
+                    <a:pt x="513204" y="2189033"/>
                   </a:lnTo>
                   <a:lnTo>
                     <a:pt x="526709" y="2180599"/>
@@ -6078,7 +6078,7 @@
                     <a:pt x="810322" y="2046676"/>
                   </a:lnTo>
                   <a:lnTo>
-                    <a:pt x="823827" y="2038510"/>
+                    <a:pt x="823827" y="2038511"/>
                   </a:lnTo>
                   <a:lnTo>
                     <a:pt x="837333" y="2029905"/>
@@ -6129,13 +6129,13 @@
                     <a:pt x="1039913" y="1841491"/>
                   </a:lnTo>
                   <a:lnTo>
-                    <a:pt x="1053419" y="1825021"/>
+                    <a:pt x="1053419" y="1825022"/>
                   </a:lnTo>
                   <a:lnTo>
                     <a:pt x="1066924" y="1808119"/>
                   </a:lnTo>
                   <a:lnTo>
-                    <a:pt x="1080430" y="1790654"/>
+                    <a:pt x="1080430" y="1790655"/>
                   </a:lnTo>
                   <a:lnTo>
                     <a:pt x="1093935" y="1772733"/>
@@ -6147,7 +6147,7 @@
                     <a:pt x="1120946" y="1735587"/>
                   </a:lnTo>
                   <a:lnTo>
-                    <a:pt x="1134451" y="1716343"/>
+                    <a:pt x="1134451" y="1716344"/>
                   </a:lnTo>
                   <a:lnTo>
                     <a:pt x="1147956" y="1696497"/>
@@ -6156,7 +6156,7 @@
                     <a:pt x="1161462" y="1676187"/>
                   </a:lnTo>
                   <a:lnTo>
-                    <a:pt x="1174967" y="1655401"/>
+                    <a:pt x="1174967" y="1655402"/>
                   </a:lnTo>
                   <a:lnTo>
                     <a:pt x="1188473" y="1634128"/>
@@ -6168,10 +6168,10 @@
                     <a:pt x="1215483" y="1589803"/>
                   </a:lnTo>
                   <a:lnTo>
-                    <a:pt x="1228989" y="1566755"/>
-                  </a:lnTo>
-                  <a:lnTo>
-                    <a:pt x="1242494" y="1543134"/>
+                    <a:pt x="1228989" y="1566756"/>
+                  </a:lnTo>
+                  <a:lnTo>
+                    <a:pt x="1242494" y="1543135"/>
                   </a:lnTo>
                   <a:lnTo>
                     <a:pt x="1255999" y="1518919"/>
@@ -6180,16 +6180,16 @@
                     <a:pt x="1269505" y="1493959"/>
                   </a:lnTo>
                   <a:lnTo>
-                    <a:pt x="1283010" y="1468229"/>
-                  </a:lnTo>
-                  <a:lnTo>
-                    <a:pt x="1296516" y="1441810"/>
+                    <a:pt x="1283010" y="1468230"/>
+                  </a:lnTo>
+                  <a:lnTo>
+                    <a:pt x="1296516" y="1441811"/>
                   </a:lnTo>
                   <a:lnTo>
                     <a:pt x="1310021" y="1414678"/>
                   </a:lnTo>
                   <a:lnTo>
-                    <a:pt x="1323526" y="1386807"/>
+                    <a:pt x="1323526" y="1386808"/>
                   </a:lnTo>
                   <a:lnTo>
                     <a:pt x="1337032" y="1357950"/>
@@ -6201,13 +6201,13 @@
                     <a:pt x="1364042" y="1297664"/>
                   </a:lnTo>
                   <a:lnTo>
-                    <a:pt x="1377548" y="1266261"/>
+                    <a:pt x="1377548" y="1266262"/>
                   </a:lnTo>
                   <a:lnTo>
                     <a:pt x="1391053" y="1233996"/>
                   </a:lnTo>
                   <a:lnTo>
-                    <a:pt x="1404559" y="1200534"/>
+                    <a:pt x="1404559" y="1200535"/>
                   </a:lnTo>
                   <a:lnTo>
                     <a:pt x="1418064" y="1166185"/>
@@ -6216,25 +6216,25 @@
                     <a:pt x="1431569" y="1130949"/>
                   </a:lnTo>
                   <a:lnTo>
-                    <a:pt x="1445075" y="1094830"/>
-                  </a:lnTo>
-                  <a:lnTo>
-                    <a:pt x="1458580" y="1057764"/>
+                    <a:pt x="1445075" y="1094831"/>
+                  </a:lnTo>
+                  <a:lnTo>
+                    <a:pt x="1458580" y="1057765"/>
                   </a:lnTo>
                   <a:lnTo>
                     <a:pt x="1472085" y="1019625"/>
                   </a:lnTo>
                   <a:lnTo>
-                    <a:pt x="1485591" y="980684"/>
-                  </a:lnTo>
-                  <a:lnTo>
-                    <a:pt x="1499096" y="940980"/>
-                  </a:lnTo>
-                  <a:lnTo>
-                    <a:pt x="1512602" y="900556"/>
-                  </a:lnTo>
-                  <a:lnTo>
-                    <a:pt x="1526107" y="859365"/>
+                    <a:pt x="1485591" y="980685"/>
+                  </a:lnTo>
+                  <a:lnTo>
+                    <a:pt x="1499096" y="940981"/>
+                  </a:lnTo>
+                  <a:lnTo>
+                    <a:pt x="1512602" y="900557"/>
+                  </a:lnTo>
+                  <a:lnTo>
+                    <a:pt x="1526107" y="859366"/>
                   </a:lnTo>
                   <a:lnTo>
                     <a:pt x="1539612" y="817514"/>
@@ -6243,13 +6243,13 @@
                     <a:pt x="1553118" y="775205"/>
                   </a:lnTo>
                   <a:lnTo>
-                    <a:pt x="1566623" y="732523"/>
+                    <a:pt x="1566623" y="732524"/>
                   </a:lnTo>
                   <a:lnTo>
                     <a:pt x="1580128" y="689559"/>
                   </a:lnTo>
                   <a:lnTo>
-                    <a:pt x="1593634" y="646414"/>
+                    <a:pt x="1593634" y="646415"/>
                   </a:lnTo>
                   <a:lnTo>
                     <a:pt x="1607139" y="603302"/>
@@ -6270,7 +6270,7 @@
                     <a:pt x="1674666" y="393591"/>
                   </a:lnTo>
                   <a:lnTo>
-                    <a:pt x="1688171" y="354074"/>
+                    <a:pt x="1688171" y="354075"/>
                   </a:lnTo>
                   <a:lnTo>
                     <a:pt x="1701677" y="315698"/>
@@ -6399,7 +6399,7 @@
                     <a:pt x="2255397" y="580406"/>
                   </a:lnTo>
                   <a:lnTo>
-                    <a:pt x="2268903" y="607404"/>
+                    <a:pt x="2268903" y="607405"/>
                   </a:lnTo>
                   <a:lnTo>
                     <a:pt x="2282408" y="633620"/>
@@ -6408,25 +6408,25 @@
                     <a:pt x="2295913" y="658913"/>
                   </a:lnTo>
                   <a:lnTo>
-                    <a:pt x="2309419" y="683078"/>
+                    <a:pt x="2309419" y="683079"/>
                   </a:lnTo>
                   <a:lnTo>
                     <a:pt x="2322924" y="706309"/>
                   </a:lnTo>
                   <a:lnTo>
-                    <a:pt x="2336430" y="728584"/>
+                    <a:pt x="2336430" y="728585"/>
                   </a:lnTo>
                   <a:lnTo>
                     <a:pt x="2349935" y="749887"/>
                   </a:lnTo>
                   <a:lnTo>
-                    <a:pt x="2363440" y="770017"/>
+                    <a:pt x="2363440" y="770018"/>
                   </a:lnTo>
                   <a:lnTo>
                     <a:pt x="2376946" y="788982"/>
                   </a:lnTo>
                   <a:lnTo>
-                    <a:pt x="2390451" y="806957"/>
+                    <a:pt x="2390451" y="806958"/>
                   </a:lnTo>
                   <a:lnTo>
                     <a:pt x="2403956" y="823951"/>
@@ -6477,10 +6477,10 @@
                     <a:pt x="2606537" y="973834"/>
                   </a:lnTo>
                   <a:lnTo>
-                    <a:pt x="2620042" y="979283"/>
-                  </a:lnTo>
-                  <a:lnTo>
-                    <a:pt x="2633548" y="984553"/>
+                    <a:pt x="2620042" y="979284"/>
+                  </a:lnTo>
+                  <a:lnTo>
+                    <a:pt x="2633548" y="984554"/>
                   </a:lnTo>
                   <a:lnTo>
                     <a:pt x="2647053" y="989754"/>
@@ -6507,7 +6507,7 @@
                     <a:pt x="2741591" y="1030308"/>
                   </a:lnTo>
                   <a:lnTo>
-                    <a:pt x="2755096" y="1037687"/>
+                    <a:pt x="2755096" y="1037688"/>
                   </a:lnTo>
                   <a:lnTo>
                     <a:pt x="2768602" y="1045638"/>
@@ -6543,10 +6543,10 @@
                     <a:pt x="2903655" y="1165477"/>
                   </a:lnTo>
                   <a:lnTo>
-                    <a:pt x="2917161" y="1181844"/>
-                  </a:lnTo>
-                  <a:lnTo>
-                    <a:pt x="2930666" y="1198930"/>
+                    <a:pt x="2917161" y="1181845"/>
+                  </a:lnTo>
+                  <a:lnTo>
+                    <a:pt x="2930666" y="1198931"/>
                   </a:lnTo>
                   <a:lnTo>
                     <a:pt x="2944171" y="1216862"/>
@@ -6588,13 +6588,13 @@
                     <a:pt x="3106236" y="1473574"/>
                   </a:lnTo>
                   <a:lnTo>
-                    <a:pt x="3119741" y="1496996"/>
+                    <a:pt x="3119741" y="1496997"/>
                   </a:lnTo>
                   <a:lnTo>
                     <a:pt x="3133247" y="1520539"/>
                   </a:lnTo>
                   <a:lnTo>
-                    <a:pt x="3146752" y="1544162"/>
+                    <a:pt x="3146752" y="1544163"/>
                   </a:lnTo>
                   <a:lnTo>
                     <a:pt x="3160257" y="1567820"/>
@@ -6618,7 +6618,7 @@
                     <a:pt x="3241290" y="1709241"/>
                   </a:lnTo>
                   <a:lnTo>
-                    <a:pt x="3254795" y="1732554"/>
+                    <a:pt x="3254795" y="1732555"/>
                   </a:lnTo>
                   <a:lnTo>
                     <a:pt x="3268300" y="1755727"/>
@@ -6642,7 +6642,7 @@
                     <a:pt x="3349333" y="1891602"/>
                   </a:lnTo>
                   <a:lnTo>
-                    <a:pt x="3362838" y="1913597"/>
+                    <a:pt x="3362838" y="1913598"/>
                   </a:lnTo>
                   <a:lnTo>
                     <a:pt x="3376343" y="1935385"/>
@@ -6672,7 +6672,7 @@
                     <a:pt x="3484387" y="2099379"/>
                   </a:lnTo>
                   <a:lnTo>
-                    <a:pt x="3497892" y="2118370"/>
+                    <a:pt x="3497892" y="2118371"/>
                   </a:lnTo>
                   <a:lnTo>
                     <a:pt x="3511397" y="2136999"/>
@@ -6690,7 +6690,7 @@
                     <a:pt x="3565419" y="2207123"/>
                   </a:lnTo>
                   <a:lnTo>
-                    <a:pt x="3578924" y="2223639"/>
+                    <a:pt x="3578924" y="2223640"/>
                   </a:lnTo>
                   <a:lnTo>
                     <a:pt x="3592430" y="2239604"/>
@@ -7471,7 +7471,7 @@
                     <a:pt x="13505" y="1982661"/>
                   </a:lnTo>
                   <a:lnTo>
-                    <a:pt x="27010" y="1981990"/>
+                    <a:pt x="27010" y="1981989"/>
                   </a:lnTo>
                   <a:lnTo>
                     <a:pt x="40516" y="1981304"/>
@@ -7543,7 +7543,7 @@
                     <a:pt x="337634" y="1961340"/>
                   </a:lnTo>
                   <a:lnTo>
-                    <a:pt x="351139" y="1960374"/>
+                    <a:pt x="351139" y="1960373"/>
                   </a:lnTo>
                   <a:lnTo>
                     <a:pt x="364645" y="1959428"/>
@@ -7567,7 +7567,7 @@
                     <a:pt x="445677" y="1954424"/>
                   </a:lnTo>
                   <a:lnTo>
-                    <a:pt x="459182" y="1953707"/>
+                    <a:pt x="459182" y="1953706"/>
                   </a:lnTo>
                   <a:lnTo>
                     <a:pt x="472688" y="1953015"/>
@@ -7666,7 +7666,7 @@
                     <a:pt x="891354" y="1886555"/>
                   </a:lnTo>
                   <a:lnTo>
-                    <a:pt x="904860" y="1880743"/>
+                    <a:pt x="904860" y="1880742"/>
                   </a:lnTo>
                   <a:lnTo>
                     <a:pt x="918365" y="1874657"/>
@@ -7906,7 +7906,7 @@
                     <a:pt x="1971784" y="973450"/>
                   </a:lnTo>
                   <a:lnTo>
-                    <a:pt x="1985290" y="953647"/>
+                    <a:pt x="1985290" y="953648"/>
                   </a:lnTo>
                   <a:lnTo>
                     <a:pt x="1998795" y="934080"/>
@@ -7936,7 +7936,7 @@
                     <a:pt x="2106838" y="787420"/>
                   </a:lnTo>
                   <a:lnTo>
-                    <a:pt x="2120344" y="770307"/>
+                    <a:pt x="2120344" y="770308"/>
                   </a:lnTo>
                   <a:lnTo>
                     <a:pt x="2133849" y="753396"/>
@@ -7963,7 +7963,7 @@
                     <a:pt x="2228387" y="639104"/>
                   </a:lnTo>
                   <a:lnTo>
-                    <a:pt x="2241892" y="623038"/>
+                    <a:pt x="2241892" y="623039"/>
                   </a:lnTo>
                   <a:lnTo>
                     <a:pt x="2255397" y="606959"/>
@@ -8119,7 +8119,7 @@
                     <a:pt x="2930666" y="6997"/>
                   </a:lnTo>
                   <a:lnTo>
-                    <a:pt x="2944171" y="10805"/>
+                    <a:pt x="2944171" y="10806"/>
                   </a:lnTo>
                   <a:lnTo>
                     <a:pt x="2957677" y="15335"/>
@@ -8161,7 +8161,7 @@
                     <a:pt x="3119741" y="107602"/>
                   </a:lnTo>
                   <a:lnTo>
-                    <a:pt x="3133247" y="116031"/>
+                    <a:pt x="3133247" y="116032"/>
                   </a:lnTo>
                   <a:lnTo>
                     <a:pt x="3146752" y="124201"/>
@@ -8170,7 +8170,7 @@
                     <a:pt x="3160257" y="131965"/>
                   </a:lnTo>
                   <a:lnTo>
-                    <a:pt x="3173763" y="139335"/>
+                    <a:pt x="3173763" y="139336"/>
                   </a:lnTo>
                   <a:lnTo>
                     <a:pt x="3187268" y="146267"/>
@@ -8188,25 +8188,25 @@
                     <a:pt x="3241290" y="168018"/>
                   </a:lnTo>
                   <a:lnTo>
-                    <a:pt x="3254795" y="171836"/>
+                    <a:pt x="3254795" y="171837"/>
                   </a:lnTo>
                   <a:lnTo>
                     <a:pt x="3268300" y="174939"/>
                   </a:lnTo>
                   <a:lnTo>
-                    <a:pt x="3281806" y="177144"/>
+                    <a:pt x="3281806" y="177145"/>
                   </a:lnTo>
                   <a:lnTo>
                     <a:pt x="3295311" y="178668"/>
                   </a:lnTo>
                   <a:lnTo>
-                    <a:pt x="3308817" y="179517"/>
+                    <a:pt x="3308817" y="179518"/>
                   </a:lnTo>
                   <a:lnTo>
                     <a:pt x="3322322" y="179703"/>
                   </a:lnTo>
                   <a:lnTo>
-                    <a:pt x="3335827" y="179092"/>
+                    <a:pt x="3335827" y="179093"/>
                   </a:lnTo>
                   <a:lnTo>
                     <a:pt x="3349333" y="177799"/>
@@ -8254,7 +8254,7 @@
                     <a:pt x="3538408" y="129823"/>
                   </a:lnTo>
                   <a:lnTo>
-                    <a:pt x="3551913" y="127683"/>
+                    <a:pt x="3551913" y="127684"/>
                   </a:lnTo>
                   <a:lnTo>
                     <a:pt x="3565419" y="126141"/>
@@ -8269,7 +8269,7 @@
                     <a:pt x="3605935" y="126520"/>
                   </a:lnTo>
                   <a:lnTo>
-                    <a:pt x="3619440" y="128370"/>
+                    <a:pt x="3619440" y="128371"/>
                   </a:lnTo>
                   <a:lnTo>
                     <a:pt x="3632946" y="131122"/>
@@ -8311,7 +8311,7 @@
                     <a:pt x="3795010" y="248617"/>
                   </a:lnTo>
                   <a:lnTo>
-                    <a:pt x="3808516" y="264699"/>
+                    <a:pt x="3808516" y="264700"/>
                   </a:lnTo>
                   <a:lnTo>
                     <a:pt x="3822021" y="281536"/>
@@ -8326,7 +8326,7 @@
                     <a:pt x="3862537" y="336284"/>
                   </a:lnTo>
                   <a:lnTo>
-                    <a:pt x="3876042" y="355529"/>
+                    <a:pt x="3876042" y="355530"/>
                   </a:lnTo>
                   <a:lnTo>
                     <a:pt x="3889548" y="375256"/>
@@ -8347,7 +8347,7 @@
                     <a:pt x="3957075" y="477767"/>
                   </a:lnTo>
                   <a:lnTo>
-                    <a:pt x="3970580" y="498611"/>
+                    <a:pt x="3970580" y="498612"/>
                   </a:lnTo>
                   <a:lnTo>
                     <a:pt x="3984085" y="519443"/>
@@ -8476,7 +8476,7 @@
                     <a:pt x="4537806" y="1209339"/>
                   </a:lnTo>
                   <a:lnTo>
-                    <a:pt x="4551311" y="1221512"/>
+                    <a:pt x="4551311" y="1221513"/>
                   </a:lnTo>
                   <a:lnTo>
                     <a:pt x="4564817" y="1233312"/>
@@ -8488,7 +8488,7 @@
                     <a:pt x="4591827" y="1255720"/>
                   </a:lnTo>
                   <a:lnTo>
-                    <a:pt x="4605333" y="1266403"/>
+                    <a:pt x="4605333" y="1266404"/>
                   </a:lnTo>
                   <a:lnTo>
                     <a:pt x="4618838" y="1276738"/>
@@ -8638,7 +8638,7 @@
                     <a:pt x="5267096" y="1664682"/>
                   </a:lnTo>
                   <a:lnTo>
-                    <a:pt x="5280602" y="1674922"/>
+                    <a:pt x="5280602" y="1674921"/>
                   </a:lnTo>
                   <a:lnTo>
                     <a:pt x="5294107" y="1685120"/>
@@ -8764,7 +8764,7 @@
                     <a:pt x="5834322" y="1932346"/>
                   </a:lnTo>
                   <a:lnTo>
-                    <a:pt x="5847827" y="1933882"/>
+                    <a:pt x="5847827" y="1933881"/>
                   </a:lnTo>
                   <a:lnTo>
                     <a:pt x="5861333" y="1935213"/>
@@ -8788,7 +8788,7 @@
                     <a:pt x="5942365" y="1939919"/>
                   </a:lnTo>
                   <a:lnTo>
-                    <a:pt x="5955870" y="1940265"/>
+                    <a:pt x="5955870" y="1940264"/>
                   </a:lnTo>
                   <a:lnTo>
                     <a:pt x="5969376" y="1940521"/>
@@ -8848,7 +8848,7 @@
                     <a:pt x="6212472" y="1943160"/>
                   </a:lnTo>
                   <a:lnTo>
-                    <a:pt x="6225978" y="1943820"/>
+                    <a:pt x="6225978" y="1943819"/>
                   </a:lnTo>
                   <a:lnTo>
                     <a:pt x="6239483" y="1944589"/>
@@ -8890,7 +8890,7 @@
                     <a:pt x="6401548" y="1959465"/>
                   </a:lnTo>
                   <a:lnTo>
-                    <a:pt x="6415053" y="1960994"/>
+                    <a:pt x="6415053" y="1960993"/>
                   </a:lnTo>
                   <a:lnTo>
                     <a:pt x="6428558" y="1962527"/>
@@ -10574,7 +10574,7 @@
                     <a:pt x="13505" y="1982661"/>
                   </a:lnTo>
                   <a:lnTo>
-                    <a:pt x="27010" y="1981990"/>
+                    <a:pt x="27010" y="1981989"/>
                   </a:lnTo>
                   <a:lnTo>
                     <a:pt x="40516" y="1981304"/>
@@ -10646,7 +10646,7 @@
                     <a:pt x="337634" y="1961340"/>
                   </a:lnTo>
                   <a:lnTo>
-                    <a:pt x="351139" y="1960374"/>
+                    <a:pt x="351139" y="1960373"/>
                   </a:lnTo>
                   <a:lnTo>
                     <a:pt x="364645" y="1959428"/>
@@ -10670,7 +10670,7 @@
                     <a:pt x="445677" y="1954424"/>
                   </a:lnTo>
                   <a:lnTo>
-                    <a:pt x="459182" y="1953707"/>
+                    <a:pt x="459182" y="1953706"/>
                   </a:lnTo>
                   <a:lnTo>
                     <a:pt x="472688" y="1953015"/>
@@ -10769,7 +10769,7 @@
                     <a:pt x="891354" y="1886555"/>
                   </a:lnTo>
                   <a:lnTo>
-                    <a:pt x="904860" y="1880743"/>
+                    <a:pt x="904860" y="1880742"/>
                   </a:lnTo>
                   <a:lnTo>
                     <a:pt x="918365" y="1874657"/>
@@ -11009,7 +11009,7 @@
                     <a:pt x="1971784" y="973450"/>
                   </a:lnTo>
                   <a:lnTo>
-                    <a:pt x="1985290" y="953647"/>
+                    <a:pt x="1985290" y="953648"/>
                   </a:lnTo>
                   <a:lnTo>
                     <a:pt x="1998795" y="934080"/>
@@ -11039,7 +11039,7 @@
                     <a:pt x="2106838" y="787420"/>
                   </a:lnTo>
                   <a:lnTo>
-                    <a:pt x="2120344" y="770307"/>
+                    <a:pt x="2120344" y="770308"/>
                   </a:lnTo>
                   <a:lnTo>
                     <a:pt x="2133849" y="753396"/>
@@ -11066,7 +11066,7 @@
                     <a:pt x="2228387" y="639104"/>
                   </a:lnTo>
                   <a:lnTo>
-                    <a:pt x="2241892" y="623038"/>
+                    <a:pt x="2241892" y="623039"/>
                   </a:lnTo>
                   <a:lnTo>
                     <a:pt x="2255397" y="606959"/>
@@ -11222,7 +11222,7 @@
                     <a:pt x="2930666" y="6997"/>
                   </a:lnTo>
                   <a:lnTo>
-                    <a:pt x="2944171" y="10805"/>
+                    <a:pt x="2944171" y="10806"/>
                   </a:lnTo>
                   <a:lnTo>
                     <a:pt x="2957677" y="15335"/>
@@ -11264,7 +11264,7 @@
                     <a:pt x="3119741" y="107602"/>
                   </a:lnTo>
                   <a:lnTo>
-                    <a:pt x="3133247" y="116031"/>
+                    <a:pt x="3133247" y="116032"/>
                   </a:lnTo>
                   <a:lnTo>
                     <a:pt x="3146752" y="124201"/>
@@ -11273,7 +11273,7 @@
                     <a:pt x="3160257" y="131965"/>
                   </a:lnTo>
                   <a:lnTo>
-                    <a:pt x="3173763" y="139335"/>
+                    <a:pt x="3173763" y="139336"/>
                   </a:lnTo>
                   <a:lnTo>
                     <a:pt x="3187268" y="146267"/>
@@ -11291,25 +11291,25 @@
                     <a:pt x="3241290" y="168018"/>
                   </a:lnTo>
                   <a:lnTo>
-                    <a:pt x="3254795" y="171836"/>
+                    <a:pt x="3254795" y="171837"/>
                   </a:lnTo>
                   <a:lnTo>
                     <a:pt x="3268300" y="174939"/>
                   </a:lnTo>
                   <a:lnTo>
-                    <a:pt x="3281806" y="177144"/>
+                    <a:pt x="3281806" y="177145"/>
                   </a:lnTo>
                   <a:lnTo>
                     <a:pt x="3295311" y="178668"/>
                   </a:lnTo>
                   <a:lnTo>
-                    <a:pt x="3308817" y="179517"/>
+                    <a:pt x="3308817" y="179518"/>
                   </a:lnTo>
                   <a:lnTo>
                     <a:pt x="3322322" y="179703"/>
                   </a:lnTo>
                   <a:lnTo>
-                    <a:pt x="3335827" y="179092"/>
+                    <a:pt x="3335827" y="179093"/>
                   </a:lnTo>
                   <a:lnTo>
                     <a:pt x="3349333" y="177799"/>
@@ -11357,7 +11357,7 @@
                     <a:pt x="3538408" y="129823"/>
                   </a:lnTo>
                   <a:lnTo>
-                    <a:pt x="3551913" y="127683"/>
+                    <a:pt x="3551913" y="127684"/>
                   </a:lnTo>
                   <a:lnTo>
                     <a:pt x="3565419" y="126141"/>
@@ -11372,7 +11372,7 @@
                     <a:pt x="3605935" y="126520"/>
                   </a:lnTo>
                   <a:lnTo>
-                    <a:pt x="3619440" y="128370"/>
+                    <a:pt x="3619440" y="128371"/>
                   </a:lnTo>
                   <a:lnTo>
                     <a:pt x="3632946" y="131122"/>
@@ -11414,7 +11414,7 @@
                     <a:pt x="3795010" y="248617"/>
                   </a:lnTo>
                   <a:lnTo>
-                    <a:pt x="3808516" y="264699"/>
+                    <a:pt x="3808516" y="264700"/>
                   </a:lnTo>
                   <a:lnTo>
                     <a:pt x="3822021" y="281536"/>
@@ -11429,7 +11429,7 @@
                     <a:pt x="3862537" y="336284"/>
                   </a:lnTo>
                   <a:lnTo>
-                    <a:pt x="3876042" y="355529"/>
+                    <a:pt x="3876042" y="355530"/>
                   </a:lnTo>
                   <a:lnTo>
                     <a:pt x="3889548" y="375256"/>
@@ -11450,7 +11450,7 @@
                     <a:pt x="3957075" y="477767"/>
                   </a:lnTo>
                   <a:lnTo>
-                    <a:pt x="3970580" y="498611"/>
+                    <a:pt x="3970580" y="498612"/>
                   </a:lnTo>
                   <a:lnTo>
                     <a:pt x="3984085" y="519443"/>
@@ -11579,7 +11579,7 @@
                     <a:pt x="4537806" y="1209339"/>
                   </a:lnTo>
                   <a:lnTo>
-                    <a:pt x="4551311" y="1221512"/>
+                    <a:pt x="4551311" y="1221513"/>
                   </a:lnTo>
                   <a:lnTo>
                     <a:pt x="4564817" y="1233312"/>
@@ -11591,7 +11591,7 @@
                     <a:pt x="4591827" y="1255720"/>
                   </a:lnTo>
                   <a:lnTo>
-                    <a:pt x="4605333" y="1266403"/>
+                    <a:pt x="4605333" y="1266404"/>
                   </a:lnTo>
                   <a:lnTo>
                     <a:pt x="4618838" y="1276738"/>
@@ -11741,7 +11741,7 @@
                     <a:pt x="5267096" y="1664682"/>
                   </a:lnTo>
                   <a:lnTo>
-                    <a:pt x="5280602" y="1674922"/>
+                    <a:pt x="5280602" y="1674921"/>
                   </a:lnTo>
                   <a:lnTo>
                     <a:pt x="5294107" y="1685120"/>
@@ -11867,7 +11867,7 @@
                     <a:pt x="5834322" y="1932346"/>
                   </a:lnTo>
                   <a:lnTo>
-                    <a:pt x="5847827" y="1933882"/>
+                    <a:pt x="5847827" y="1933881"/>
                   </a:lnTo>
                   <a:lnTo>
                     <a:pt x="5861333" y="1935213"/>
@@ -11891,7 +11891,7 @@
                     <a:pt x="5942365" y="1939919"/>
                   </a:lnTo>
                   <a:lnTo>
-                    <a:pt x="5955870" y="1940265"/>
+                    <a:pt x="5955870" y="1940264"/>
                   </a:lnTo>
                   <a:lnTo>
                     <a:pt x="5969376" y="1940521"/>
@@ -11951,7 +11951,7 @@
                     <a:pt x="6212472" y="1943160"/>
                   </a:lnTo>
                   <a:lnTo>
-                    <a:pt x="6225978" y="1943820"/>
+                    <a:pt x="6225978" y="1943819"/>
                   </a:lnTo>
                   <a:lnTo>
                     <a:pt x="6239483" y="1944589"/>
@@ -11993,7 +11993,7 @@
                     <a:pt x="6401548" y="1959465"/>
                   </a:lnTo>
                   <a:lnTo>
-                    <a:pt x="6415053" y="1960994"/>
+                    <a:pt x="6415053" y="1960993"/>
                   </a:lnTo>
                   <a:lnTo>
                     <a:pt x="6428558" y="1962527"/>
